--- a/research/poc/PP-04/artifacts/existing-shape-mutation.pptx
+++ b/research/poc/PP-04/artifacts/existing-shape-mutation.pptx
@@ -5,7 +5,7 @@
     <p:sldMasterId id="2147483648" r:id="rId1"/>
   </p:sldMasterIdLst>
   <p:sldIdLst>
-    <p:sldId id="256" r:id="Rc0371d2d24274adf"/>
+    <p:sldId id="256" r:id="R55c089dd446e4aad"/>
   </p:sldIdLst>
   <p:sldSz cx="9144000" cy="6858000" type="screen4x3"/>
   <p:notesSz cx="6858000" cy="9144000"/>

--- a/research/poc/PP-04/artifacts/existing-shape-mutation.pptx
+++ b/research/poc/PP-04/artifacts/existing-shape-mutation.pptx
@@ -5,7 +5,7 @@
     <p:sldMasterId id="2147483648" r:id="rId1"/>
   </p:sldMasterIdLst>
   <p:sldIdLst>
-    <p:sldId id="256" r:id="R55c089dd446e4aad"/>
+    <p:sldId id="256" r:id="Rde25cb44d327416d"/>
   </p:sldIdLst>
   <p:sldSz cx="9144000" cy="6858000" type="screen4x3"/>
   <p:notesSz cx="6858000" cy="9144000"/>

--- a/research/poc/PP-04/artifacts/existing-shape-mutation.pptx
+++ b/research/poc/PP-04/artifacts/existing-shape-mutation.pptx
@@ -5,7 +5,7 @@
     <p:sldMasterId id="2147483648" r:id="rId1"/>
   </p:sldMasterIdLst>
   <p:sldIdLst>
-    <p:sldId id="256" r:id="Rde25cb44d327416d"/>
+    <p:sldId id="256" r:id="R08137353495d4f89"/>
   </p:sldIdLst>
   <p:sldSz cx="9144000" cy="6858000" type="screen4x3"/>
   <p:notesSz cx="6858000" cy="9144000"/>
